--- a/wbm_wdm_matching_strategy.pptx
+++ b/wbm_wdm_matching_strategy.pptx
@@ -3285,14 +3285,14 @@
               </a:defRPr>
             </a:pPr>
             <a:r>
-              <a:rPr sz="1200" b="0">
+              <a:rPr sz="1400" b="0">
                 <a:solidFill>
                   <a:srgbClr val="555B63"/>
                 </a:solidFill>
               </a:rPr>
               <a:t>shape_sim</a:t>
             </a:r>
-            <a:endParaRPr sz="1200" b="0">
+            <a:endParaRPr sz="1400" b="0">
               <a:solidFill>
                 <a:srgbClr val="555B63"/>
               </a:solidFill>
@@ -3359,14 +3359,14 @@
               </a:defRPr>
             </a:pPr>
             <a:r>
-              <a:rPr sz="1200" b="0">
+              <a:rPr sz="1400" b="0">
                 <a:solidFill>
                   <a:srgbClr val="555B63"/>
                 </a:solidFill>
               </a:rPr>
               <a:t>descriptor dot product；低于 0.45 则 pair_score=0</a:t>
             </a:r>
-            <a:endParaRPr sz="1200" b="0">
+            <a:endParaRPr sz="1400" b="0">
               <a:solidFill>
                 <a:srgbClr val="555B63"/>
               </a:solidFill>
@@ -3433,14 +3433,14 @@
               </a:defRPr>
             </a:pPr>
             <a:r>
-              <a:rPr sz="1200" b="0">
+              <a:rPr sz="1400" b="0">
                 <a:solidFill>
                   <a:srgbClr val="555B63"/>
                 </a:solidFill>
               </a:rPr>
               <a:t>形状先验硬门槛</a:t>
             </a:r>
-            <a:endParaRPr sz="1200" b="0">
+            <a:endParaRPr sz="1400" b="0">
               <a:solidFill>
                 <a:srgbClr val="555B63"/>
               </a:solidFill>
@@ -3509,14 +3509,14 @@
               </a:defRPr>
             </a:pPr>
             <a:r>
-              <a:rPr sz="1200" b="0">
+              <a:rPr sz="1400" b="0">
                 <a:solidFill>
                   <a:srgbClr val="555B63"/>
                 </a:solidFill>
               </a:rPr>
               <a:t>position_affinity</a:t>
             </a:r>
-            <a:endParaRPr sz="1200" b="0">
+            <a:endParaRPr sz="1400" b="0">
               <a:solidFill>
                 <a:srgbClr val="555B63"/>
               </a:solidFill>
@@ -3583,14 +3583,14 @@
               </a:defRPr>
             </a:pPr>
             <a:r>
-              <a:rPr sz="1200" b="0">
+              <a:rPr sz="1400" b="0">
                 <a:solidFill>
                   <a:srgbClr val="555B63"/>
                 </a:solidFill>
               </a:rPr>
               <a:t>exp(-pos_dist² / sigma_pos²)</a:t>
             </a:r>
-            <a:endParaRPr sz="1200" b="0">
+            <a:endParaRPr sz="1400" b="0">
               <a:solidFill>
                 <a:srgbClr val="555B63"/>
               </a:solidFill>
@@ -3657,14 +3657,14 @@
               </a:defRPr>
             </a:pPr>
             <a:r>
-              <a:rPr sz="1200" b="0">
+              <a:rPr sz="1400" b="0">
                 <a:solidFill>
                   <a:srgbClr val="555B63"/>
                 </a:solidFill>
               </a:rPr>
               <a:t>质心位置越接近越高</a:t>
             </a:r>
-            <a:endParaRPr sz="1200" b="0">
+            <a:endParaRPr sz="1400" b="0">
               <a:solidFill>
                 <a:srgbClr val="555B63"/>
               </a:solidFill>
@@ -3733,14 +3733,14 @@
               </a:defRPr>
             </a:pPr>
             <a:r>
-              <a:rPr sz="1200" b="0">
+              <a:rPr sz="1400" b="0">
                 <a:solidFill>
                   <a:srgbClr val="555B63"/>
                 </a:solidFill>
               </a:rPr>
               <a:t>scale_affinity</a:t>
             </a:r>
-            <a:endParaRPr sz="1200" b="0">
+            <a:endParaRPr sz="1400" b="0">
               <a:solidFill>
                 <a:srgbClr val="555B63"/>
               </a:solidFill>
@@ -3807,14 +3807,14 @@
               </a:defRPr>
             </a:pPr>
             <a:r>
-              <a:rPr sz="1200" b="0">
+              <a:rPr sz="1400" b="0">
                 <a:solidFill>
                   <a:srgbClr val="555B63"/>
                 </a:solidFill>
               </a:rPr>
               <a:t>exp(-|log(q_scale/c_scale)| / sigma_scale)</a:t>
             </a:r>
-            <a:endParaRPr sz="1200" b="0">
+            <a:endParaRPr sz="1400" b="0">
               <a:solidFill>
                 <a:srgbClr val="555B63"/>
               </a:solidFill>
@@ -3957,14 +3957,14 @@
               </a:defRPr>
             </a:pPr>
             <a:r>
-              <a:rPr sz="1200" b="0">
+              <a:rPr sz="1400" b="0">
                 <a:solidFill>
                   <a:srgbClr val="555B63"/>
                 </a:solidFill>
               </a:rPr>
               <a:t>type_affinity</a:t>
             </a:r>
-            <a:endParaRPr sz="1200" b="0">
+            <a:endParaRPr sz="1400" b="0">
               <a:solidFill>
                 <a:srgbClr val="555B63"/>
               </a:solidFill>
@@ -4031,14 +4031,14 @@
               </a:defRPr>
             </a:pPr>
             <a:r>
-              <a:rPr sz="1200" b="0">
+              <a:rPr sz="1400" b="0">
                 <a:solidFill>
                   <a:srgbClr val="555B63"/>
                 </a:solidFill>
               </a:rPr>
               <a:t>同类 1.0；兼容 0.6；其他 0.25</a:t>
             </a:r>
-            <a:endParaRPr sz="1200" b="0">
+            <a:endParaRPr sz="1400" b="0">
               <a:solidFill>
                 <a:srgbClr val="555B63"/>
               </a:solidFill>
@@ -4105,14 +4105,14 @@
               </a:defRPr>
             </a:pPr>
             <a:r>
-              <a:rPr sz="1200" b="0">
+              <a:rPr sz="1400" b="0">
                 <a:solidFill>
                   <a:srgbClr val="555B63"/>
                 </a:solidFill>
               </a:rPr>
               <a:t>几何类型软降权</a:t>
             </a:r>
-            <a:endParaRPr sz="1200" b="0">
+            <a:endParaRPr sz="1400" b="0">
               <a:solidFill>
                 <a:srgbClr val="555B63"/>
               </a:solidFill>
@@ -4359,7 +4359,23 @@
                   <a:srgbClr val="101114"/>
                 </a:solidFill>
               </a:rPr>
-              <a:t>count-partial：方案简介与衡量指标</a:t>
+              <a:t>count</a:t>
+            </a:r>
+            <a:r>
+              <a:rPr lang="en-US" sz="3000" b="1">
+                <a:solidFill>
+                  <a:srgbClr val="101114"/>
+                </a:solidFill>
+              </a:rPr>
+              <a:t> map</a:t>
+            </a:r>
+            <a:r>
+              <a:rPr sz="3000" b="1">
+                <a:solidFill>
+                  <a:srgbClr val="101114"/>
+                </a:solidFill>
+              </a:rPr>
+              <a:t>：方案简介与衡量指标</a:t>
             </a:r>
             <a:endParaRPr sz="3000" b="1">
               <a:solidFill>
@@ -5484,7 +5500,23 @@
                   <a:srgbClr val="101114"/>
                 </a:solidFill>
               </a:rPr>
-              <a:t>Classnumber：分图匹配方案与图上指标</a:t>
+              <a:t>Classnumber</a:t>
+            </a:r>
+            <a:r>
+              <a:rPr lang="en-US" sz="2800" b="1">
+                <a:solidFill>
+                  <a:srgbClr val="101114"/>
+                </a:solidFill>
+              </a:rPr>
+              <a:t> split map</a:t>
+            </a:r>
+            <a:r>
+              <a:rPr sz="2800" b="1">
+                <a:solidFill>
+                  <a:srgbClr val="101114"/>
+                </a:solidFill>
+              </a:rPr>
+              <a:t>：分图匹配方案与图上指标</a:t>
             </a:r>
             <a:endParaRPr sz="2800" b="1">
               <a:solidFill>
@@ -8011,8 +8043,8 @@
         </p:nvSpPr>
         <p:spPr>
           <a:xfrm>
-            <a:off x="551180" y="3140710"/>
-            <a:ext cx="10792460" cy="3107690"/>
+            <a:off x="551180" y="2780665"/>
+            <a:ext cx="10863580" cy="3753485"/>
           </a:xfrm>
           <a:prstGeom prst="rect">
             <a:avLst/>
@@ -8026,7 +8058,7 @@
           <a:p>
             <a:r>
               <a:rPr lang="en-US" altLang="zh-CN" sz="1400"/>
-              <a:t> 1. Proposal extraction</a:t>
+              <a:t>  1. Proposal extraction</a:t>
             </a:r>
             <a:endParaRPr lang="en-US" altLang="zh-CN" sz="1400"/>
           </a:p>
@@ -8053,15 +8085,31 @@
             </a:r>
             <a:r>
               <a:rPr lang="zh-CN" altLang="en-US" sz="1400"/>
-              <a:t>中提取关键图案区域，并构建候选</a:t>
+              <a:t>中提取局部候选区域，并计算区域级统计特征</a:t>
             </a:r>
             <a:r>
               <a:rPr lang="en-US" altLang="zh-CN" sz="1400"/>
-              <a:t> proposal</a:t>
+              <a:t>，</a:t>
             </a:r>
             <a:r>
               <a:rPr lang="zh-CN" altLang="en-US" sz="1400"/>
-              <a:t>，同时生成区域级特征。</a:t>
+              <a:t>包括面积、质量、质心、</a:t>
+            </a:r>
+            <a:r>
+              <a:rPr lang="en-US" altLang="zh-CN" sz="1400"/>
+              <a:t>bbox</a:t>
+            </a:r>
+            <a:r>
+              <a:rPr lang="zh-CN" altLang="en-US" sz="1400"/>
+              <a:t>、</a:t>
+            </a:r>
+            <a:r>
+              <a:rPr lang="en-US" altLang="zh-CN" sz="1400"/>
+              <a:t>PCA</a:t>
+            </a:r>
+            <a:r>
+              <a:rPr lang="zh-CN" altLang="en-US" sz="1400"/>
+              <a:t>、径向位置等。</a:t>
             </a:r>
             <a:endParaRPr lang="zh-CN" altLang="en-US" sz="1400"/>
           </a:p>
@@ -8090,7 +8138,31 @@
             </a:r>
             <a:r>
               <a:rPr lang="zh-CN" altLang="en-US" sz="1400"/>
-              <a:t>进一步提取形状描述子，形成可比较的几何表征。</a:t>
+              <a:t>的像素分布构造</a:t>
+            </a:r>
+            <a:r>
+              <a:rPr lang="en-US" altLang="zh-CN" sz="1400"/>
+              <a:t> shape descriptor</a:t>
+            </a:r>
+            <a:r>
+              <a:rPr lang="zh-CN" altLang="en-US" sz="1400"/>
+              <a:t>，用于描述局部区域的几何形态。当前</a:t>
+            </a:r>
+            <a:r>
+              <a:rPr lang="en-US" altLang="zh-CN" sz="1400"/>
+              <a:t> descriptor </a:t>
+            </a:r>
+            <a:r>
+              <a:rPr lang="zh-CN" altLang="en-US" sz="1400"/>
+              <a:t>是归一化向量，</a:t>
+            </a:r>
+            <a:r>
+              <a:rPr lang="en-US" altLang="zh-CN" sz="1400"/>
+              <a:t>shape </a:t>
+            </a:r>
+            <a:r>
+              <a:rPr lang="zh-CN" altLang="en-US" sz="1400"/>
+              <a:t>相似度通过向量点积计算。</a:t>
             </a:r>
             <a:endParaRPr lang="zh-CN" altLang="en-US" sz="1400"/>
           </a:p>
@@ -8111,7 +8183,31 @@
             </a:r>
             <a:r>
               <a:rPr lang="zh-CN" altLang="en-US" sz="1400"/>
-              <a:t>融合区域特征与形状特征，生成统一的</a:t>
+              <a:t>将区域统计特征、</a:t>
+            </a:r>
+            <a:r>
+              <a:rPr lang="en-US" altLang="zh-CN" sz="1400"/>
+              <a:t>shape descriptor</a:t>
+            </a:r>
+            <a:r>
+              <a:rPr lang="zh-CN" altLang="en-US" sz="1400"/>
+              <a:t>、</a:t>
+            </a:r>
+            <a:r>
+              <a:rPr lang="en-US" altLang="zh-CN" sz="1400"/>
+              <a:t>geometry type </a:t>
+            </a:r>
+            <a:r>
+              <a:rPr lang="zh-CN" altLang="en-US" sz="1400"/>
+              <a:t>和原始像素集合组织为</a:t>
+            </a:r>
+            <a:r>
+              <a:rPr lang="en-US" altLang="zh-CN" sz="1400"/>
+              <a:t> token</a:t>
+            </a:r>
+            <a:r>
+              <a:rPr lang="zh-CN" altLang="en-US" sz="1400"/>
+              <a:t>。当前</a:t>
             </a:r>
             <a:r>
               <a:rPr lang="en-US" altLang="zh-CN" sz="1400"/>
@@ -8119,7 +8215,15 @@
             </a:r>
             <a:r>
               <a:rPr lang="zh-CN" altLang="en-US" sz="1400"/>
-              <a:t>表达。</a:t>
+              <a:t>是结构化特征集合，而不是统一学习得到的</a:t>
+            </a:r>
+            <a:r>
+              <a:rPr lang="en-US" altLang="zh-CN" sz="1400"/>
+              <a:t> embedding</a:t>
+            </a:r>
+            <a:r>
+              <a:rPr lang="zh-CN" altLang="en-US" sz="1400"/>
+              <a:t>。</a:t>
             </a:r>
             <a:endParaRPr lang="zh-CN" altLang="en-US" sz="1400"/>
           </a:p>
@@ -8144,27 +8248,35 @@
             </a:r>
             <a:r>
               <a:rPr lang="en-US" altLang="zh-CN" sz="1400"/>
-              <a:t> token </a:t>
+              <a:t> token pair </a:t>
             </a:r>
             <a:r>
               <a:rPr lang="zh-CN" altLang="en-US" sz="1400"/>
-              <a:t>为基本单元进行相似性计算，评估</a:t>
+              <a:t>为比较对象，分别计算形状、位置、尺度和类型兼容度，再通过启发式公式融合为局部匹配分数。当前采用</a:t>
             </a:r>
             <a:r>
               <a:rPr lang="en-US" altLang="zh-CN" sz="1400"/>
-              <a:t> Defect map </a:t>
+              <a:t> WBM token </a:t>
             </a:r>
             <a:r>
               <a:rPr lang="zh-CN" altLang="en-US" sz="1400"/>
-              <a:t>与</a:t>
+              <a:t>到</a:t>
             </a:r>
             <a:r>
               <a:rPr lang="en-US" altLang="zh-CN" sz="1400"/>
-              <a:t> CP map </a:t>
+              <a:t> WDM token </a:t>
             </a:r>
             <a:r>
               <a:rPr lang="zh-CN" altLang="en-US" sz="1400"/>
-              <a:t>的局部对应关系。</a:t>
+              <a:t>的单向</a:t>
+            </a:r>
+            <a:r>
+              <a:rPr lang="en-US" altLang="zh-CN" sz="1400"/>
+              <a:t> best-match </a:t>
+            </a:r>
+            <a:r>
+              <a:rPr lang="zh-CN" altLang="en-US" sz="1400"/>
+              <a:t>聚合。</a:t>
             </a:r>
             <a:endParaRPr lang="zh-CN" altLang="en-US" sz="1400"/>
           </a:p>
@@ -8185,15 +8297,23 @@
             </a:r>
             <a:r>
               <a:rPr lang="zh-CN" altLang="en-US" sz="1400"/>
-              <a:t>综合局部匹配结果，对候选</a:t>
+              <a:t>对每个候选</a:t>
             </a:r>
             <a:r>
               <a:rPr lang="en-US" altLang="zh-CN" sz="1400"/>
-              <a:t> Defect map </a:t>
+              <a:t> CP/WDM map </a:t>
             </a:r>
             <a:r>
               <a:rPr lang="zh-CN" altLang="en-US" sz="1400"/>
-              <a:t>进行排序，选出</a:t>
+              <a:t>计算</a:t>
+            </a:r>
+            <a:r>
+              <a:rPr lang="en-US" altLang="zh-CN" sz="1400"/>
+              <a:t> count-partial </a:t>
+            </a:r>
+            <a:r>
+              <a:rPr lang="zh-CN" altLang="en-US" sz="1400"/>
+              <a:t>分数，并按分数排序，选出</a:t>
             </a:r>
             <a:r>
               <a:rPr lang="en-US" altLang="zh-CN" sz="1400"/>
@@ -8201,7 +8321,7 @@
             </a:r>
             <a:r>
               <a:rPr lang="zh-CN" altLang="en-US" sz="1400"/>
-              <a:t>最优匹配结果。</a:t>
+              <a:t>候选结果。</a:t>
             </a:r>
             <a:endParaRPr lang="zh-CN" altLang="en-US" sz="1400"/>
           </a:p>
@@ -10533,55 +10653,6 @@
       </p:sp>
       <p:sp>
         <p:nvSpPr>
-          <p:cNvPr id="13" name="矩形 12"/>
-          <p:cNvSpPr>
-            <a:spLocks noGrp="1"/>
-          </p:cNvSpPr>
-          <p:nvPr/>
-        </p:nvSpPr>
-        <p:spPr>
-          <a:xfrm>
-            <a:off x="819150" y="3419475"/>
-            <a:ext cx="190500" cy="228600"/>
-          </a:xfrm>
-          <a:prstGeom prst="rect">
-            <a:avLst/>
-          </a:prstGeom>
-          <a:noFill/>
-          <a:ln w="0">
-            <a:noFill/>
-            <a:prstDash val="solid"/>
-          </a:ln>
-        </p:spPr>
-        <p:txBody>
-          <a:bodyPr/>
-          <a:lstStyle/>
-          <a:p>
-            <a:pPr algn="l">
-              <a:defRPr sz="1350" b="1">
-                <a:solidFill>
-                  <a:srgbClr val="2563A6"/>
-                </a:solidFill>
-              </a:defRPr>
-            </a:pPr>
-            <a:r>
-              <a:rPr sz="1400" b="1">
-                <a:solidFill>
-                  <a:srgbClr val="2563A6"/>
-                </a:solidFill>
-              </a:rPr>
-              <a:t>•</a:t>
-            </a:r>
-            <a:endParaRPr sz="1400" b="1">
-              <a:solidFill>
-                <a:srgbClr val="2563A6"/>
-              </a:solidFill>
-            </a:endParaRPr>
-          </a:p>
-        </p:txBody>
-      </p:sp>
-      <p:sp>
-        <p:nvSpPr>
           <p:cNvPr id="16" name="矩形 15"/>
           <p:cNvSpPr>
             <a:spLocks noGrp="1"/>
@@ -10613,14 +10684,6 @@
                 </a:solidFill>
               </a:defRPr>
             </a:pPr>
-            <a:r>
-              <a:rPr sz="1400" b="0">
-                <a:solidFill>
-                  <a:srgbClr val="101114"/>
-                </a:solidFill>
-              </a:rPr>
-              <a:t>优点是简单</a:t>
-            </a:r>
             <a:endParaRPr sz="1400" b="0">
               <a:solidFill>
                 <a:srgbClr val="101114"/>
@@ -11298,7 +11361,7 @@
         </p:nvSpPr>
         <p:spPr>
           <a:xfrm>
-            <a:off x="6600190" y="2348865"/>
+            <a:off x="6240145" y="2348865"/>
             <a:ext cx="4848225" cy="342900"/>
           </a:xfrm>
           <a:prstGeom prst="rect">
@@ -11394,7 +11457,7 @@
         </p:nvSpPr>
         <p:spPr>
           <a:xfrm>
-            <a:off x="263525" y="2421255"/>
+            <a:off x="263525" y="2348865"/>
             <a:ext cx="4848225" cy="342900"/>
           </a:xfrm>
           <a:prstGeom prst="rect">
